--- a/dist/초5/사회·역사/역사와생활/초5_사회·역사_역사와생활_05_개항과일제강점기_학생용.pptx
+++ b/dist/초5/사회·역사/역사와생활/초5_사회·역사_역사와생활_05_개항과일제강점기_학생용.pptx
@@ -120,13 +120,13 @@
   <p:extLst>
     <p:ext uri="{521415D9-36F7-43E2-AB2F-B90AF26B5E84}">
       <p14:sectionLst xmlns:p14="http://schemas.microsoft.com/office/powerpoint/2010/main">
-        <p14:section name="도입" id="{2df9a9f6-ee4d-2c68-8622-10a8f7ad0aaf}">
+        <p14:section name="도입" id="{c6f03b7d-7cf9-5208-f264-6dd981720987}">
           <p14:sldIdLst>
             <p14:sldId id="256"/>
             <p14:sldId id="257"/>
           </p14:sldIdLst>
         </p14:section>
-        <p14:section name="개념" id="{41417950-66e1-9244-d848-09f2b0100910}">
+        <p14:section name="개념" id="{c9eb66b0-8bf2-b04b-b751-5459a19b4cc3}">
           <p14:sldIdLst>
             <p14:sldId id="258"/>
             <p14:sldId id="259"/>
@@ -136,30 +136,30 @@
             <p14:sldId id="264"/>
           </p14:sldIdLst>
         </p14:section>
-        <p14:section name="연습" id="{cc8eb9da-4864-b93f-a6f2-87b048efab6f}">
+        <p14:section name="연습" id="{b99f8725-3ee3-bf4e-a512-a79caf617073}">
           <p14:sldIdLst>
             <p14:sldId id="261"/>
             <p14:sldId id="265"/>
             <p14:sldId id="266"/>
           </p14:sldIdLst>
         </p14:section>
-        <p14:section name="개념" id="{511923d4-142f-a1b7-a2e3-77908d8e94da}">
+        <p14:section name="개념" id="{14dcd7e1-3301-c7d3-0671-f306d70949f9}">
           <p14:sldIdLst/>
         </p14:section>
-        <p14:section name="연습" id="{c8804d10-44cc-79a3-b7ba-dd9255668664}">
+        <p14:section name="연습" id="{7b69d135-93d4-b4c0-a655-85374150cacf}">
           <p14:sldIdLst/>
         </p14:section>
-        <p14:section name="확인" id="{5c19d682-c938-0b7e-79b3-719154397d02}">
+        <p14:section name="확인" id="{2c458252-960e-d94f-fa29-05509ff3b9a0}">
           <p14:sldIdLst>
             <p14:sldId id="267"/>
           </p14:sldIdLst>
         </p14:section>
-        <p14:section name="정리" id="{b14c749e-5c3c-ae90-6cb7-646264776bed}">
+        <p14:section name="정리" id="{f0590e58-bea5-3c3e-7b47-bd77dd16ca97}">
           <p14:sldIdLst>
             <p14:sldId id="268"/>
           </p14:sldIdLst>
         </p14:section>
-        <p14:section name="보충" id="{e978af03-c82b-a1af-3810-a4cd795c78b6}">
+        <p14:section name="보충" id="{f570e2be-4b5d-3821-9bbc-9082655293ff}">
           <p14:sldIdLst>
             <p14:sldId id="269"/>
           </p14:sldIdLst>
